--- a/docs/midnight-mcp-manual-v2.pptx
+++ b/docs/midnight-mcp-manual-v2.pptx
@@ -3637,7 +3637,7 @@
                   <a:srgbClr val="CCCCCC"/>
                 </a:solidFill>
               </a:rPr>
-              <a:t>金額・宛先を秘匿したまま送金</a:t>
+              <a:t>金額を秘匿し、両者の公開鍵を開示して残高更新</a:t>
             </a:r>
             <a:endParaRPr lang="en-US" sz="1300" dirty="0"/>
           </a:p>
@@ -3732,7 +3732,7 @@
                   <a:srgbClr val="0066FF"/>
                 </a:solidFill>
               </a:rPr>
-              <a:t>プライベート</a:t>
+              <a:t>公開出力</a:t>
             </a:r>
             <a:endParaRPr lang="en-US" sz="1300" dirty="0"/>
           </a:p>
@@ -3768,7 +3768,7 @@
                   <a:srgbClr val="CCCCCC"/>
                 </a:solidFill>
               </a:rPr>
-              <a:t>自分の残高を確認（他者非公開）</a:t>
+              <a:t>呼び出すと残高の実値を公開</a:t>
             </a:r>
             <a:endParaRPr lang="en-US" sz="1300" dirty="0"/>
           </a:p>
@@ -3776,90 +3776,14 @@
       </p:sp>
       <p:sp>
         <p:nvSpPr>
-          <p:cNvPr id="26" name="Shape 24"/>
-          <p:cNvSpPr/>
-          <p:nvPr/>
-        </p:nvSpPr>
-        <p:spPr>
-          <a:xfrm>
-            <a:off x="548640" y="4206240"/>
-            <a:ext cx="8046720" cy="320040"/>
-          </a:xfrm>
-          <a:prstGeom prst="rect">
-            <a:avLst/>
-          </a:prstGeom>
-          <a:solidFill>
-            <a:srgbClr val="0066FF"/>
-          </a:solidFill>
-          <a:ln/>
-        </p:spPr>
-      </p:sp>
-      <p:sp>
-        <p:nvSpPr>
-          <p:cNvPr id="27" name="Text 25"/>
-          <p:cNvSpPr/>
-          <p:nvPr/>
-        </p:nvSpPr>
-        <p:spPr>
-          <a:xfrm>
-            <a:off x="685800" y="4206240"/>
-            <a:ext cx="7772400" cy="320040"/>
-          </a:xfrm>
-          <a:prstGeom prst="rect">
-            <a:avLst/>
-          </a:prstGeom>
-          <a:noFill/>
-          <a:ln/>
-        </p:spPr>
-        <p:txBody>
-          <a:bodyPr wrap="square" lIns="0" tIns="0" rIns="0" bIns="0" rtlCol="0" anchor="ctr"/>
-          <a:lstStyle/>
-          <a:p>
-            <a:pPr indent="0" marL="0">
-              <a:buNone/>
-            </a:pPr>
-            <a:r>
-              <a:rPr lang="en-US" sz="1200" b="1" dirty="0">
-                <a:solidFill>
-                  <a:srgbClr val="FFFFFF"/>
-                </a:solidFill>
-              </a:rPr>
-              <a:t>プロンプト⑥ セキュリティレビュー（オプション）</a:t>
-            </a:r>
-            <a:endParaRPr lang="en-US" sz="1200" dirty="0"/>
-          </a:p>
-        </p:txBody>
-      </p:sp>
-      <p:sp>
-        <p:nvSpPr>
-          <p:cNvPr id="28" name="Shape 26"/>
-          <p:cNvSpPr/>
-          <p:nvPr/>
-        </p:nvSpPr>
-        <p:spPr>
-          <a:xfrm>
-            <a:off x="548640" y="4526280"/>
-            <a:ext cx="8046720" cy="502920"/>
-          </a:xfrm>
-          <a:prstGeom prst="rect">
-            <a:avLst/>
-          </a:prstGeom>
-          <a:solidFill>
-            <a:srgbClr val="0D1117"/>
-          </a:solidFill>
-          <a:ln/>
-        </p:spPr>
-      </p:sp>
-      <p:sp>
-        <p:nvSpPr>
-          <p:cNvPr id="29" name="Text 27"/>
-          <p:cNvSpPr/>
-          <p:nvPr/>
-        </p:nvSpPr>
-        <p:spPr>
-          <a:xfrm>
-            <a:off x="685800" y="4572000"/>
-            <a:ext cx="7772400" cy="365760"/>
+          <p:cNvPr id="26" name="Text 24"/>
+          <p:cNvSpPr/>
+          <p:nvPr/>
+        </p:nvSpPr>
+        <p:spPr>
+          <a:xfrm>
+            <a:off x="548640" y="4617720"/>
+            <a:ext cx="8046720" cy="274320"/>
           </a:xfrm>
           <a:prstGeom prst="rect">
             <a:avLst/>
@@ -3877,30 +3801,10 @@
             <a:r>
               <a:rPr lang="en-US" sz="1200" dirty="0">
                 <a:solidFill>
-                  <a:srgbClr val="E6EDF3"/>
-                </a:solidFill>
-                <a:latin typeface="Consolas" pitchFamily="34" charset="0"/>
-                <a:ea typeface="Consolas" pitchFamily="34" charset="-122"/>
-                <a:cs typeface="Consolas" pitchFamily="34" charset="-120"/>
-              </a:rPr>
-              <a:t>このコントラクトのセキュリティレビューを</a:t>
-            </a:r>
-            <a:endParaRPr lang="en-US" sz="1200" dirty="0"/>
-          </a:p>
-          <a:p>
-            <a:pPr indent="0" marL="0">
-              <a:buNone/>
-            </a:pPr>
-            <a:r>
-              <a:rPr lang="en-US" sz="1200" dirty="0">
-                <a:solidFill>
-                  <a:srgbClr val="E6EDF3"/>
-                </a:solidFill>
-                <a:latin typeface="Consolas" pitchFamily="34" charset="0"/>
-                <a:ea typeface="Consolas" pitchFamily="34" charset="-122"/>
-                <a:cs typeface="Consolas" pitchFamily="34" charset="-120"/>
-              </a:rPr>
-              <a:t>実施してください</a:t>
+                  <a:srgbClr val="0066FF"/>
+                </a:solidFill>
+              </a:rPr>
+              <a:t>任意プロンプト⑥：このコントラクトのセキュリティレビューを実施してください</a:t>
             </a:r>
             <a:endParaRPr lang="en-US" sz="1200" dirty="0"/>
           </a:p>
@@ -11494,7 +11398,7 @@
                 <a:ea typeface="Consolas" pitchFamily="34" charset="-122"/>
                 <a:cs typeface="Consolas" pitchFamily="34" charset="-120"/>
               </a:rPr>
-              <a:t>Compact言語で、送金額と送金先を非公開にした</a:t>
+              <a:t>Compact言語で、送金額と残高実値を非公開にし、</a:t>
             </a:r>
             <a:endParaRPr lang="en-US" sz="1200" dirty="0"/>
           </a:p>
@@ -11511,14 +11415,8 @@
                 <a:ea typeface="Consolas" pitchFamily="34" charset="-122"/>
                 <a:cs typeface="Consolas" pitchFamily="34" charset="-120"/>
               </a:rPr>
-              <a:t>プライベート決済コントラクトを作成してください。</a:t>
-            </a:r>
-            <a:endParaRPr lang="en-US" sz="1200" dirty="0"/>
-          </a:p>
-          <a:p>
-            <a:pPr indent="0" marL="0">
-              <a:buNone/>
-            </a:pPr>
+              <a:t>送信者と受取人の公開鍵を公開する残高更新</a:t>
+            </a:r>
             <a:endParaRPr lang="en-US" sz="1200" dirty="0"/>
           </a:p>
           <a:p>
@@ -11534,8 +11432,14 @@
                 <a:ea typeface="Consolas" pitchFamily="34" charset="-122"/>
                 <a:cs typeface="Consolas" pitchFamily="34" charset="-120"/>
               </a:rPr>
-              <a:t>要件:</a:t>
-            </a:r>
+              <a:t>コントラクトを作成してください。</a:t>
+            </a:r>
+            <a:endParaRPr lang="en-US" sz="1200" dirty="0"/>
+          </a:p>
+          <a:p>
+            <a:pPr indent="0" marL="0">
+              <a:buNone/>
+            </a:pPr>
             <a:endParaRPr lang="en-US" sz="1200" dirty="0"/>
           </a:p>
           <a:p>
@@ -11551,7 +11455,7 @@
                 <a:ea typeface="Consolas" pitchFamily="34" charset="-122"/>
                 <a:cs typeface="Consolas" pitchFamily="34" charset="-120"/>
               </a:rPr>
-              <a:t>- 送金額（amount）は非公開（witness）</a:t>
+              <a:t>要件:</a:t>
             </a:r>
             <a:endParaRPr lang="en-US" sz="1200" dirty="0"/>
           </a:p>
@@ -11568,7 +11472,7 @@
                 <a:ea typeface="Consolas" pitchFamily="34" charset="-122"/>
                 <a:cs typeface="Consolas" pitchFamily="34" charset="-120"/>
               </a:rPr>
-              <a:t>- 送金先（recipient）は非公開（witness）</a:t>
+              <a:t>- 送金額（amount）は非公開（witness）</a:t>
             </a:r>
             <a:endParaRPr lang="en-US" sz="1200" dirty="0"/>
           </a:p>
@@ -11585,7 +11489,7 @@
                 <a:ea typeface="Consolas" pitchFamily="34" charset="-122"/>
                 <a:cs typeface="Consolas" pitchFamily="34" charset="-120"/>
               </a:rPr>
-              <a:t>- 残高の正当性はZKPで証明</a:t>
+              <a:t>- 両者の公開鍵は disclose() して公開</a:t>
             </a:r>
             <a:endParaRPr lang="en-US" sz="1200" dirty="0"/>
           </a:p>
@@ -11602,7 +11506,7 @@
                 <a:ea typeface="Consolas" pitchFamily="34" charset="-122"/>
                 <a:cs typeface="Consolas" pitchFamily="34" charset="-120"/>
               </a:rPr>
-              <a:t>- 残高不足の場合はエラー</a:t>
+              <a:t>- 残高の正当性はZKPで証明</a:t>
             </a:r>
             <a:endParaRPr lang="en-US" sz="1200" dirty="0"/>
           </a:p>
@@ -11619,7 +11523,7 @@
                 <a:ea typeface="Consolas" pitchFamily="34" charset="-122"/>
                 <a:cs typeface="Consolas" pitchFamily="34" charset="-120"/>
               </a:rPr>
-              <a:t>- contracts/ フォルダに保存してください</a:t>
+              <a:t>- 残高不足の場合はエラー</a:t>
             </a:r>
             <a:endParaRPr lang="en-US" sz="1200" dirty="0"/>
           </a:p>
@@ -12301,7 +12205,7 @@
                   <a:srgbClr val="CCCCCC"/>
                 </a:solidFill>
               </a:rPr>
-              <a:t>ローカルのみ・非公開</a:t>
+              <a:t>ローカル入力</a:t>
             </a:r>
             <a:endParaRPr lang="en-US" sz="1100" dirty="0"/>
           </a:p>
@@ -12369,7 +12273,21 @@
                   <a:srgbClr val="CCCCCC"/>
                 </a:solidFill>
               </a:rPr>
-              <a:t>チェーンに絶対に乗らない</a:t>
+              <a:t>recipient公開鍵は</a:t>
+            </a:r>
+            <a:endParaRPr lang="en-US" sz="1100" dirty="0"/>
+          </a:p>
+          <a:p>
+            <a:pPr indent="0" marL="0">
+              <a:buNone/>
+            </a:pPr>
+            <a:r>
+              <a:rPr lang="en-US" sz="1100" dirty="0">
+                <a:solidFill>
+                  <a:srgbClr val="CCCCCC"/>
+                </a:solidFill>
+              </a:rPr>
+              <a:t>disclose()で公開</a:t>
             </a:r>
             <a:endParaRPr lang="en-US" sz="1100" dirty="0"/>
           </a:p>
@@ -12504,7 +12422,7 @@
                   <a:srgbClr val="CCCCCC"/>
                 </a:solidFill>
               </a:rPr>
-              <a:t>deposit = 入金（公開）</a:t>
+              <a:t>deposit = 公開額で更新</a:t>
             </a:r>
             <a:endParaRPr lang="en-US" sz="1100" dirty="0"/>
           </a:p>
@@ -12532,7 +12450,7 @@
                   <a:srgbClr val="CCCCCC"/>
                 </a:solidFill>
               </a:rPr>
-              <a:t>= ZKP送金（非公開）</a:t>
+              <a:t>= 金額秘匿・公開鍵公開</a:t>
             </a:r>
             <a:endParaRPr lang="en-US" sz="1100" dirty="0"/>
           </a:p>
@@ -12560,7 +12478,7 @@
                   <a:srgbClr val="CCCCCC"/>
                 </a:solidFill>
               </a:rPr>
-              <a:t>= 残高確認（非公開）</a:t>
+              <a:t>= 残高を公開</a:t>
             </a:r>
             <a:endParaRPr lang="en-US" sz="1100" dirty="0"/>
           </a:p>
